--- a/SOUTENANCE_GROUPE_6.pptx
+++ b/SOUTENANCE_GROUPE_6.pptx
@@ -3949,7 +3949,7 @@
                 <a:ea typeface="Calibri" pitchFamily="34" charset="-122"/>
                 <a:cs typeface="Calibri" pitchFamily="34" charset="-120"/>
               </a:rPr>
-              <a:t>GROUPE 3</a:t>
+              <a:t>GROUPE 6</a:t>
             </a:r>
             <a:endParaRPr lang="en-US" sz="1400" dirty="0"/>
           </a:p>
